--- a/projetos/gestao-ia-planilhas/produto/kit-completo/entrega/16-modelo-resultado-do-trimestre-12-slides.pptx
+++ b/projetos/gestao-ia-planilhas/produto/kit-completo/entrega/16-modelo-resultado-do-trimestre-12-slides.pptx
@@ -204,7 +204,7 @@
                 <c:formatCode>General</c:formatCode>
                 <c:ptCount val="4"/>
                 <c:pt idx="0">
-                  <c:v>81</c:v>
+                  <c:v>82</c:v>
                 </c:pt>
                 <c:pt idx="1">
                   <c:v>53</c:v>
@@ -213,7 +213,7 @@
                   <c:v>57</c:v>
                 </c:pt>
                 <c:pt idx="3">
-                  <c:v>71</c:v>
+                  <c:v>58</c:v>
                 </c:pt>
               </c:numCache>
             </c:numRef>
@@ -1975,7 +1975,7 @@
           <a:p>
             <a:r>
               <a:rPr lang="en-US" dirty="0"/>
-              <a:t>Capa. A frase em itálico é a conclusão do trimestre em uma linha. Escreva por último.</a:t>
+              <a:t>Modelo do Seu Sócio Gestor: troque os textos e mantenha a estrutura. Capa. A frase em itálico é a conclusão do trimestre em uma linha. Escreva por último.</a:t>
             </a:r>
             <a:endParaRPr lang="en-US" dirty="0"/>
           </a:p>
@@ -2855,7 +2855,7 @@
           <a:p>
             <a:r>
               <a:rPr lang="en-US" dirty="0"/>
-              <a:t>Financeiro do trimestre. Os três números vêm da aba "O ano, mês a mês" somando os três meses.</a:t>
+              <a:t>Financeiro do trimestre. Os três números vêm da aba "O ano, mês a mês" somando os três meses; os desvios por categoria, da aba Realizado somada no trimestre.</a:t>
             </a:r>
             <a:endParaRPr lang="en-US" dirty="0"/>
           </a:p>
@@ -3549,8 +3549,8 @@
         </p:nvSpPr>
         <p:spPr>
           <a:xfrm>
-            <a:off x="457200" y="4773168"/>
-            <a:ext cx="6858000" cy="228600"/>
+            <a:off x="457200" y="4791456"/>
+            <a:ext cx="6858000" cy="201168"/>
           </a:xfrm>
           <a:prstGeom prst="rect">
             <a:avLst/>
@@ -3566,17 +3566,17 @@
               <a:buNone/>
             </a:pPr>
             <a:r>
-              <a:rPr lang="en-US" sz="800" dirty="0">
-                <a:solidFill>
-                  <a:srgbClr val="B89BE0"/>
-                </a:solidFill>
-                <a:latin typeface="Arial" pitchFamily="34" charset="0"/>
-                <a:ea typeface="Arial" pitchFamily="34" charset="-122"/>
-                <a:cs typeface="Arial" pitchFamily="34" charset="-120"/>
-              </a:rPr>
-              <a:t>Kit IA no Trabalho · Completo · modelo do Seu Sócio Gestor. Troque os textos; mantenha a estrutura.</a:t>
-            </a:r>
-            <a:endParaRPr lang="en-US" sz="800" dirty="0"/>
+              <a:rPr lang="en-US" sz="700" dirty="0">
+                <a:solidFill>
+                  <a:srgbClr val="7A5AA8"/>
+                </a:solidFill>
+                <a:latin typeface="Arial" pitchFamily="34" charset="0"/>
+                <a:ea typeface="Arial" pitchFamily="34" charset="-122"/>
+                <a:cs typeface="Arial" pitchFamily="34" charset="-120"/>
+              </a:rPr>
+              <a:t>Kit IA no Trabalho · modelo v1.0 · set/2026</a:t>
+            </a:r>
+            <a:endParaRPr lang="en-US" sz="700" dirty="0"/>
           </a:p>
         </p:txBody>
       </p:sp>
@@ -4238,8 +4238,8 @@
         </p:nvSpPr>
         <p:spPr>
           <a:xfrm>
-            <a:off x="457200" y="4773168"/>
-            <a:ext cx="6858000" cy="228600"/>
+            <a:off x="457200" y="4791456"/>
+            <a:ext cx="6858000" cy="201168"/>
           </a:xfrm>
           <a:prstGeom prst="rect">
             <a:avLst/>
@@ -4255,17 +4255,17 @@
               <a:buNone/>
             </a:pPr>
             <a:r>
-              <a:rPr lang="en-US" sz="800" dirty="0">
-                <a:solidFill>
-                  <a:srgbClr val="7A5AA8"/>
-                </a:solidFill>
-                <a:latin typeface="Arial" pitchFamily="34" charset="0"/>
-                <a:ea typeface="Arial" pitchFamily="34" charset="-122"/>
-                <a:cs typeface="Arial" pitchFamily="34" charset="-120"/>
-              </a:rPr>
-              <a:t>Kit IA no Trabalho · Completo · modelo do Seu Sócio Gestor. Troque os textos; mantenha a estrutura.</a:t>
-            </a:r>
-            <a:endParaRPr lang="en-US" sz="800" dirty="0"/>
+              <a:rPr lang="en-US" sz="700" dirty="0">
+                <a:solidFill>
+                  <a:srgbClr val="B89BE0"/>
+                </a:solidFill>
+                <a:latin typeface="Arial" pitchFamily="34" charset="0"/>
+                <a:ea typeface="Arial" pitchFamily="34" charset="-122"/>
+                <a:cs typeface="Arial" pitchFamily="34" charset="-120"/>
+              </a:rPr>
+              <a:t>Kit IA no Trabalho · modelo v1.0 · set/2026</a:t>
+            </a:r>
+            <a:endParaRPr lang="en-US" sz="700" dirty="0"/>
           </a:p>
         </p:txBody>
       </p:sp>
@@ -4586,7 +4586,7 @@
                 <a:ea typeface="Arial" pitchFamily="34" charset="-122"/>
                 <a:cs typeface="Arial" pitchFamily="34" charset="-120"/>
               </a:rPr>
-              <a:t>R$ 35 mil/mês · 4 contratos novos</a:t>
+              <a:t>R$ 35 mil/mês · 4 contratos novos · 30 propostas</a:t>
             </a:r>
             <a:endParaRPr lang="en-US" sz="1100" dirty="0"/>
           </a:p>
@@ -5071,8 +5071,8 @@
         </p:nvSpPr>
         <p:spPr>
           <a:xfrm>
-            <a:off x="457200" y="4773168"/>
-            <a:ext cx="6858000" cy="228600"/>
+            <a:off x="457200" y="4791456"/>
+            <a:ext cx="6858000" cy="201168"/>
           </a:xfrm>
           <a:prstGeom prst="rect">
             <a:avLst/>
@@ -5088,17 +5088,17 @@
               <a:buNone/>
             </a:pPr>
             <a:r>
-              <a:rPr lang="en-US" sz="800" dirty="0">
-                <a:solidFill>
-                  <a:srgbClr val="7A5AA8"/>
-                </a:solidFill>
-                <a:latin typeface="Arial" pitchFamily="34" charset="0"/>
-                <a:ea typeface="Arial" pitchFamily="34" charset="-122"/>
-                <a:cs typeface="Arial" pitchFamily="34" charset="-120"/>
-              </a:rPr>
-              <a:t>Kit IA no Trabalho · Completo · modelo do Seu Sócio Gestor. Troque os textos; mantenha a estrutura.</a:t>
-            </a:r>
-            <a:endParaRPr lang="en-US" sz="800" dirty="0"/>
+              <a:rPr lang="en-US" sz="700" dirty="0">
+                <a:solidFill>
+                  <a:srgbClr val="B89BE0"/>
+                </a:solidFill>
+                <a:latin typeface="Arial" pitchFamily="34" charset="0"/>
+                <a:ea typeface="Arial" pitchFamily="34" charset="-122"/>
+                <a:cs typeface="Arial" pitchFamily="34" charset="-120"/>
+              </a:rPr>
+              <a:t>Kit IA no Trabalho · modelo v1.0 · set/2026</a:t>
+            </a:r>
+            <a:endParaRPr lang="en-US" sz="700" dirty="0"/>
           </a:p>
         </p:txBody>
       </p:sp>
@@ -5374,8 +5374,8 @@
         </p:nvSpPr>
         <p:spPr>
           <a:xfrm>
-            <a:off x="457200" y="4773168"/>
-            <a:ext cx="6858000" cy="228600"/>
+            <a:off x="457200" y="4791456"/>
+            <a:ext cx="6858000" cy="201168"/>
           </a:xfrm>
           <a:prstGeom prst="rect">
             <a:avLst/>
@@ -5391,17 +5391,17 @@
               <a:buNone/>
             </a:pPr>
             <a:r>
-              <a:rPr lang="en-US" sz="800" dirty="0">
-                <a:solidFill>
-                  <a:srgbClr val="B89BE0"/>
-                </a:solidFill>
-                <a:latin typeface="Arial" pitchFamily="34" charset="0"/>
-                <a:ea typeface="Arial" pitchFamily="34" charset="-122"/>
-                <a:cs typeface="Arial" pitchFamily="34" charset="-120"/>
-              </a:rPr>
-              <a:t>Kit IA no Trabalho · Completo · modelo do Seu Sócio Gestor. Troque os textos; mantenha a estrutura.</a:t>
-            </a:r>
-            <a:endParaRPr lang="en-US" sz="800" dirty="0"/>
+              <a:rPr lang="en-US" sz="700" dirty="0">
+                <a:solidFill>
+                  <a:srgbClr val="7A5AA8"/>
+                </a:solidFill>
+                <a:latin typeface="Arial" pitchFamily="34" charset="0"/>
+                <a:ea typeface="Arial" pitchFamily="34" charset="-122"/>
+                <a:cs typeface="Arial" pitchFamily="34" charset="-120"/>
+              </a:rPr>
+              <a:t>Kit IA no Trabalho · modelo v1.0 · set/2026</a:t>
+            </a:r>
+            <a:endParaRPr lang="en-US" sz="700" dirty="0"/>
           </a:p>
         </p:txBody>
       </p:sp>
@@ -6094,7 +6094,7 @@
                 <a:ea typeface="Arial" pitchFamily="34" charset="-122"/>
                 <a:cs typeface="Arial" pitchFamily="34" charset="-120"/>
               </a:rPr>
-              <a:t>entrega no prazo, retrabalho e horas extras: veja os slides 7 a 9</a:t>
+              <a:t>entrega no prazo, retrabalho e horas extras: veja os slides 5 a 7</a:t>
             </a:r>
             <a:endParaRPr lang="en-US" sz="1050" dirty="0"/>
           </a:p>
@@ -6147,8 +6147,8 @@
         </p:nvSpPr>
         <p:spPr>
           <a:xfrm>
-            <a:off x="457200" y="4773168"/>
-            <a:ext cx="6858000" cy="228600"/>
+            <a:off x="457200" y="4791456"/>
+            <a:ext cx="6858000" cy="201168"/>
           </a:xfrm>
           <a:prstGeom prst="rect">
             <a:avLst/>
@@ -6164,17 +6164,17 @@
               <a:buNone/>
             </a:pPr>
             <a:r>
-              <a:rPr lang="en-US" sz="800" dirty="0">
-                <a:solidFill>
-                  <a:srgbClr val="7A5AA8"/>
-                </a:solidFill>
-                <a:latin typeface="Arial" pitchFamily="34" charset="0"/>
-                <a:ea typeface="Arial" pitchFamily="34" charset="-122"/>
-                <a:cs typeface="Arial" pitchFamily="34" charset="-120"/>
-              </a:rPr>
-              <a:t>Kit IA no Trabalho · Completo · modelo do Seu Sócio Gestor. Troque os textos; mantenha a estrutura.</a:t>
-            </a:r>
-            <a:endParaRPr lang="en-US" sz="800" dirty="0"/>
+              <a:rPr lang="en-US" sz="700" dirty="0">
+                <a:solidFill>
+                  <a:srgbClr val="B89BE0"/>
+                </a:solidFill>
+                <a:latin typeface="Arial" pitchFamily="34" charset="0"/>
+                <a:ea typeface="Arial" pitchFamily="34" charset="-122"/>
+                <a:cs typeface="Arial" pitchFamily="34" charset="-120"/>
+              </a:rPr>
+              <a:t>Kit IA no Trabalho · modelo v1.0 · set/2026</a:t>
+            </a:r>
+            <a:endParaRPr lang="en-US" sz="700" dirty="0"/>
           </a:p>
         </p:txBody>
       </p:sp>
@@ -6511,7 +6511,7 @@
                 <a:ea typeface="Arial" pitchFamily="34" charset="-122"/>
                 <a:cs typeface="Arial" pitchFamily="34" charset="-120"/>
               </a:rPr>
-              <a:t>Casa: relatório mensal saiu no dia 5 em dois dos três meses.</a:t>
+              <a:t>Casa: relatório no dia 5 em dois dos três meses; horas extras ainda em 14 h.</a:t>
             </a:r>
             <a:endParaRPr lang="en-US" sz="1150" dirty="0"/>
           </a:p>
@@ -6525,8 +6525,8 @@
         </p:nvSpPr>
         <p:spPr>
           <a:xfrm>
-            <a:off x="457200" y="4773168"/>
-            <a:ext cx="6858000" cy="228600"/>
+            <a:off x="457200" y="4791456"/>
+            <a:ext cx="6858000" cy="201168"/>
           </a:xfrm>
           <a:prstGeom prst="rect">
             <a:avLst/>
@@ -6542,17 +6542,17 @@
               <a:buNone/>
             </a:pPr>
             <a:r>
-              <a:rPr lang="en-US" sz="800" dirty="0">
-                <a:solidFill>
-                  <a:srgbClr val="7A5AA8"/>
-                </a:solidFill>
-                <a:latin typeface="Arial" pitchFamily="34" charset="0"/>
-                <a:ea typeface="Arial" pitchFamily="34" charset="-122"/>
-                <a:cs typeface="Arial" pitchFamily="34" charset="-120"/>
-              </a:rPr>
-              <a:t>Kit IA no Trabalho · Completo · modelo do Seu Sócio Gestor. Troque os textos; mantenha a estrutura.</a:t>
-            </a:r>
-            <a:endParaRPr lang="en-US" sz="800" dirty="0"/>
+              <a:rPr lang="en-US" sz="700" dirty="0">
+                <a:solidFill>
+                  <a:srgbClr val="B89BE0"/>
+                </a:solidFill>
+                <a:latin typeface="Arial" pitchFamily="34" charset="0"/>
+                <a:ea typeface="Arial" pitchFamily="34" charset="-122"/>
+                <a:cs typeface="Arial" pitchFamily="34" charset="-120"/>
+              </a:rPr>
+              <a:t>Kit IA no Trabalho · modelo v1.0 · set/2026</a:t>
+            </a:r>
+            <a:endParaRPr lang="en-US" sz="700" dirty="0"/>
           </a:p>
         </p:txBody>
       </p:sp>
@@ -6944,8 +6944,8 @@
         </p:nvSpPr>
         <p:spPr>
           <a:xfrm>
-            <a:off x="457200" y="4773168"/>
-            <a:ext cx="6858000" cy="228600"/>
+            <a:off x="457200" y="4791456"/>
+            <a:ext cx="6858000" cy="201168"/>
           </a:xfrm>
           <a:prstGeom prst="rect">
             <a:avLst/>
@@ -6961,17 +6961,17 @@
               <a:buNone/>
             </a:pPr>
             <a:r>
-              <a:rPr lang="en-US" sz="800" dirty="0">
-                <a:solidFill>
-                  <a:srgbClr val="7A5AA8"/>
-                </a:solidFill>
-                <a:latin typeface="Arial" pitchFamily="34" charset="0"/>
-                <a:ea typeface="Arial" pitchFamily="34" charset="-122"/>
-                <a:cs typeface="Arial" pitchFamily="34" charset="-120"/>
-              </a:rPr>
-              <a:t>Kit IA no Trabalho · Completo · modelo do Seu Sócio Gestor. Troque os textos; mantenha a estrutura.</a:t>
-            </a:r>
-            <a:endParaRPr lang="en-US" sz="800" dirty="0"/>
+              <a:rPr lang="en-US" sz="700" dirty="0">
+                <a:solidFill>
+                  <a:srgbClr val="B89BE0"/>
+                </a:solidFill>
+                <a:latin typeface="Arial" pitchFamily="34" charset="0"/>
+                <a:ea typeface="Arial" pitchFamily="34" charset="-122"/>
+                <a:cs typeface="Arial" pitchFamily="34" charset="-120"/>
+              </a:rPr>
+              <a:t>Kit IA no Trabalho · modelo v1.0 · set/2026</a:t>
+            </a:r>
+            <a:endParaRPr lang="en-US" sz="700" dirty="0"/>
           </a:p>
         </p:txBody>
       </p:sp>
@@ -7618,8 +7618,8 @@
         </p:nvSpPr>
         <p:spPr>
           <a:xfrm>
-            <a:off x="457200" y="4773168"/>
-            <a:ext cx="6858000" cy="228600"/>
+            <a:off x="457200" y="4791456"/>
+            <a:ext cx="6858000" cy="201168"/>
           </a:xfrm>
           <a:prstGeom prst="rect">
             <a:avLst/>
@@ -7635,17 +7635,17 @@
               <a:buNone/>
             </a:pPr>
             <a:r>
-              <a:rPr lang="en-US" sz="800" dirty="0">
-                <a:solidFill>
-                  <a:srgbClr val="7A5AA8"/>
-                </a:solidFill>
-                <a:latin typeface="Arial" pitchFamily="34" charset="0"/>
-                <a:ea typeface="Arial" pitchFamily="34" charset="-122"/>
-                <a:cs typeface="Arial" pitchFamily="34" charset="-120"/>
-              </a:rPr>
-              <a:t>Kit IA no Trabalho · Completo · modelo do Seu Sócio Gestor. Troque os textos; mantenha a estrutura.</a:t>
-            </a:r>
-            <a:endParaRPr lang="en-US" sz="800" dirty="0"/>
+              <a:rPr lang="en-US" sz="700" dirty="0">
+                <a:solidFill>
+                  <a:srgbClr val="B89BE0"/>
+                </a:solidFill>
+                <a:latin typeface="Arial" pitchFamily="34" charset="0"/>
+                <a:ea typeface="Arial" pitchFamily="34" charset="-122"/>
+                <a:cs typeface="Arial" pitchFamily="34" charset="-120"/>
+              </a:rPr>
+              <a:t>Kit IA no Trabalho · modelo v1.0 · set/2026</a:t>
+            </a:r>
+            <a:endParaRPr lang="en-US" sz="700" dirty="0"/>
           </a:p>
         </p:txBody>
       </p:sp>
@@ -8057,8 +8057,8 @@
         </p:nvSpPr>
         <p:spPr>
           <a:xfrm>
-            <a:off x="457200" y="4773168"/>
-            <a:ext cx="6858000" cy="228600"/>
+            <a:off x="457200" y="4791456"/>
+            <a:ext cx="6858000" cy="201168"/>
           </a:xfrm>
           <a:prstGeom prst="rect">
             <a:avLst/>
@@ -8074,17 +8074,17 @@
               <a:buNone/>
             </a:pPr>
             <a:r>
-              <a:rPr lang="en-US" sz="800" dirty="0">
-                <a:solidFill>
-                  <a:srgbClr val="7A5AA8"/>
-                </a:solidFill>
-                <a:latin typeface="Arial" pitchFamily="34" charset="0"/>
-                <a:ea typeface="Arial" pitchFamily="34" charset="-122"/>
-                <a:cs typeface="Arial" pitchFamily="34" charset="-120"/>
-              </a:rPr>
-              <a:t>Kit IA no Trabalho · Completo · modelo do Seu Sócio Gestor. Troque os textos; mantenha a estrutura.</a:t>
-            </a:r>
-            <a:endParaRPr lang="en-US" sz="800" dirty="0"/>
+              <a:rPr lang="en-US" sz="700" dirty="0">
+                <a:solidFill>
+                  <a:srgbClr val="B89BE0"/>
+                </a:solidFill>
+                <a:latin typeface="Arial" pitchFamily="34" charset="0"/>
+                <a:ea typeface="Arial" pitchFamily="34" charset="-122"/>
+                <a:cs typeface="Arial" pitchFamily="34" charset="-120"/>
+              </a:rPr>
+              <a:t>Kit IA no Trabalho · modelo v1.0 · set/2026</a:t>
+            </a:r>
+            <a:endParaRPr lang="en-US" sz="700" dirty="0"/>
           </a:p>
         </p:txBody>
       </p:sp>
@@ -8710,8 +8710,8 @@
         </p:nvSpPr>
         <p:spPr>
           <a:xfrm>
-            <a:off x="457200" y="4773168"/>
-            <a:ext cx="6858000" cy="228600"/>
+            <a:off x="457200" y="4791456"/>
+            <a:ext cx="6858000" cy="201168"/>
           </a:xfrm>
           <a:prstGeom prst="rect">
             <a:avLst/>
@@ -8727,17 +8727,17 @@
               <a:buNone/>
             </a:pPr>
             <a:r>
-              <a:rPr lang="en-US" sz="800" dirty="0">
-                <a:solidFill>
-                  <a:srgbClr val="7A5AA8"/>
-                </a:solidFill>
-                <a:latin typeface="Arial" pitchFamily="34" charset="0"/>
-                <a:ea typeface="Arial" pitchFamily="34" charset="-122"/>
-                <a:cs typeface="Arial" pitchFamily="34" charset="-120"/>
-              </a:rPr>
-              <a:t>Kit IA no Trabalho · Completo · modelo do Seu Sócio Gestor. Troque os textos; mantenha a estrutura.</a:t>
-            </a:r>
-            <a:endParaRPr lang="en-US" sz="800" dirty="0"/>
+              <a:rPr lang="en-US" sz="700" dirty="0">
+                <a:solidFill>
+                  <a:srgbClr val="B89BE0"/>
+                </a:solidFill>
+                <a:latin typeface="Arial" pitchFamily="34" charset="0"/>
+                <a:ea typeface="Arial" pitchFamily="34" charset="-122"/>
+                <a:cs typeface="Arial" pitchFamily="34" charset="-120"/>
+              </a:rPr>
+              <a:t>Kit IA no Trabalho · modelo v1.0 · set/2026</a:t>
+            </a:r>
+            <a:endParaRPr lang="en-US" sz="700" dirty="0"/>
           </a:p>
         </p:txBody>
       </p:sp>
@@ -8914,7 +8914,7 @@
                 <a:ea typeface="Arial" pitchFamily="34" charset="-122"/>
                 <a:cs typeface="Arial" pitchFamily="34" charset="-120"/>
               </a:rPr>
-              <a:t>Financeiro: receita 1% acima do previsto, despesa 4% acima</a:t>
+              <a:t>Financeiro: receita 2% abaixo do previsto e despesa 5% acima</a:t>
             </a:r>
             <a:endParaRPr lang="en-US" sz="2400" dirty="0"/>
           </a:p>
@@ -8953,7 +8953,7 @@
                 <a:ea typeface="Arial" pitchFamily="34" charset="-122"/>
                 <a:cs typeface="Arial" pitchFamily="34" charset="-120"/>
               </a:rPr>
-              <a:t>Orçamento Previsto × Realizado, julho a setembro (R$ mil).</a:t>
+              <a:t>Previsto × Realizado, julho a setembro (R$ mil). Resultado: R$ 30,9 mil contra R$ 46,6 mil previstos.</a:t>
             </a:r>
             <a:endParaRPr lang="en-US" sz="1200" dirty="0"/>
           </a:p>
@@ -9011,7 +9011,7 @@
                 <a:ea typeface="Arial" pitchFamily="34" charset="-122"/>
                 <a:cs typeface="Arial" pitchFamily="34" charset="-120"/>
               </a:rPr>
-              <a:t>O que estourou</a:t>
+              <a:t>O que faltou</a:t>
             </a:r>
             <a:endParaRPr lang="en-US" sz="1150" dirty="0"/>
           </a:p>
@@ -9032,7 +9032,27 @@
                 <a:ea typeface="Arial" pitchFamily="34" charset="-122"/>
                 <a:cs typeface="Arial" pitchFamily="34" charset="-120"/>
               </a:rPr>
-              <a:t>Freelancers: +19% (campanha do Bistrô).</a:t>
+              <a:t>Projetos: 3% abaixo do previsto; mensalidades no previsto.</a:t>
+            </a:r>
+            <a:endParaRPr lang="en-US" sz="1150" dirty="0"/>
+          </a:p>
+          <a:p>
+            <a:pPr indent="0" marL="0">
+              <a:spcAft>
+                <a:spcPts val="600"/>
+              </a:spcAft>
+              <a:buNone/>
+            </a:pPr>
+            <a:r>
+              <a:rPr lang="en-US" sz="1150" b="1" dirty="0">
+                <a:solidFill>
+                  <a:srgbClr val="3B1F5E"/>
+                </a:solidFill>
+                <a:latin typeface="Arial" pitchFamily="34" charset="0"/>
+                <a:ea typeface="Arial" pitchFamily="34" charset="-122"/>
+                <a:cs typeface="Arial" pitchFamily="34" charset="-120"/>
+              </a:rPr>
+              <a:t>O que estourou</a:t>
             </a:r>
             <a:endParaRPr lang="en-US" sz="1150" dirty="0"/>
           </a:p>
@@ -9053,7 +9073,7 @@
                 <a:ea typeface="Arial" pitchFamily="34" charset="-122"/>
                 <a:cs typeface="Arial" pitchFamily="34" charset="-120"/>
               </a:rPr>
-              <a:t>Marketing e mídia: +30% (teste de anúncios).</a:t>
+              <a:t>Freelancers: +23% (campanha do Bistrô).</a:t>
             </a:r>
             <a:endParaRPr lang="en-US" sz="1150" dirty="0"/>
           </a:p>
@@ -9074,27 +9094,7 @@
                 <a:ea typeface="Arial" pitchFamily="34" charset="-122"/>
                 <a:cs typeface="Arial" pitchFamily="34" charset="-120"/>
               </a:rPr>
-              <a:t>Softwares: +16% (duas assinaturas novas).</a:t>
-            </a:r>
-            <a:endParaRPr lang="en-US" sz="1150" dirty="0"/>
-          </a:p>
-          <a:p>
-            <a:pPr indent="0" marL="0">
-              <a:spcAft>
-                <a:spcPts val="600"/>
-              </a:spcAft>
-              <a:buNone/>
-            </a:pPr>
-            <a:r>
-              <a:rPr lang="en-US" sz="1150" b="1" dirty="0">
-                <a:solidFill>
-                  <a:srgbClr val="3B1F5E"/>
-                </a:solidFill>
-                <a:latin typeface="Arial" pitchFamily="34" charset="0"/>
-                <a:ea typeface="Arial" pitchFamily="34" charset="-122"/>
-                <a:cs typeface="Arial" pitchFamily="34" charset="-120"/>
-              </a:rPr>
-              <a:t>O que fazer</a:t>
+              <a:t>Marketing e mídia: +29% (teste de anúncios).</a:t>
             </a:r>
             <a:endParaRPr lang="en-US" sz="1150" dirty="0"/>
           </a:p>
@@ -9115,6 +9115,47 @@
                 <a:ea typeface="Arial" pitchFamily="34" charset="-122"/>
                 <a:cs typeface="Arial" pitchFamily="34" charset="-120"/>
               </a:rPr>
+              <a:t>Softwares: +13% (duas assinaturas novas).</a:t>
+            </a:r>
+            <a:endParaRPr lang="en-US" sz="1150" dirty="0"/>
+          </a:p>
+          <a:p>
+            <a:pPr indent="0" marL="0">
+              <a:spcAft>
+                <a:spcPts val="600"/>
+              </a:spcAft>
+              <a:buNone/>
+            </a:pPr>
+            <a:r>
+              <a:rPr lang="en-US" sz="1150" b="1" dirty="0">
+                <a:solidFill>
+                  <a:srgbClr val="3B1F5E"/>
+                </a:solidFill>
+                <a:latin typeface="Arial" pitchFamily="34" charset="0"/>
+                <a:ea typeface="Arial" pitchFamily="34" charset="-122"/>
+                <a:cs typeface="Arial" pitchFamily="34" charset="-120"/>
+              </a:rPr>
+              <a:t>O que fazer</a:t>
+            </a:r>
+            <a:endParaRPr lang="en-US" sz="1150" dirty="0"/>
+          </a:p>
+          <a:p>
+            <a:pPr marL="342900" indent="-342900">
+              <a:spcAft>
+                <a:spcPts val="600"/>
+              </a:spcAft>
+              <a:buSzPct val="100000"/>
+              <a:buChar char="•"/>
+            </a:pPr>
+            <a:r>
+              <a:rPr lang="en-US" sz="1150" dirty="0">
+                <a:solidFill>
+                  <a:srgbClr val="1F1235"/>
+                </a:solidFill>
+                <a:latin typeface="Arial" pitchFamily="34" charset="0"/>
+                <a:ea typeface="Arial" pitchFamily="34" charset="-122"/>
+                <a:cs typeface="Arial" pitchFamily="34" charset="-120"/>
+              </a:rPr>
               <a:t>Congelar assinaturas; mídia só com meta de conversão.</a:t>
             </a:r>
             <a:endParaRPr lang="en-US" sz="1150" dirty="0"/>
@@ -9129,8 +9170,8 @@
         </p:nvSpPr>
         <p:spPr>
           <a:xfrm>
-            <a:off x="457200" y="4773168"/>
-            <a:ext cx="6858000" cy="228600"/>
+            <a:off x="457200" y="4791456"/>
+            <a:ext cx="6858000" cy="201168"/>
           </a:xfrm>
           <a:prstGeom prst="rect">
             <a:avLst/>
@@ -9146,17 +9187,17 @@
               <a:buNone/>
             </a:pPr>
             <a:r>
-              <a:rPr lang="en-US" sz="800" dirty="0">
-                <a:solidFill>
-                  <a:srgbClr val="7A5AA8"/>
-                </a:solidFill>
-                <a:latin typeface="Arial" pitchFamily="34" charset="0"/>
-                <a:ea typeface="Arial" pitchFamily="34" charset="-122"/>
-                <a:cs typeface="Arial" pitchFamily="34" charset="-120"/>
-              </a:rPr>
-              <a:t>Kit IA no Trabalho · Completo · modelo do Seu Sócio Gestor. Troque os textos; mantenha a estrutura.</a:t>
-            </a:r>
-            <a:endParaRPr lang="en-US" sz="800" dirty="0"/>
+              <a:rPr lang="en-US" sz="700" dirty="0">
+                <a:solidFill>
+                  <a:srgbClr val="B89BE0"/>
+                </a:solidFill>
+                <a:latin typeface="Arial" pitchFamily="34" charset="0"/>
+                <a:ea typeface="Arial" pitchFamily="34" charset="-122"/>
+                <a:cs typeface="Arial" pitchFamily="34" charset="-120"/>
+              </a:rPr>
+              <a:t>Kit IA no Trabalho · modelo v1.0 · set/2026</a:t>
+            </a:r>
+            <a:endParaRPr lang="en-US" sz="700" dirty="0"/>
           </a:p>
         </p:txBody>
       </p:sp>
@@ -9547,8 +9588,8 @@
         </p:nvSpPr>
         <p:spPr>
           <a:xfrm>
-            <a:off x="457200" y="4773168"/>
-            <a:ext cx="6858000" cy="228600"/>
+            <a:off x="457200" y="4791456"/>
+            <a:ext cx="6858000" cy="201168"/>
           </a:xfrm>
           <a:prstGeom prst="rect">
             <a:avLst/>
@@ -9564,17 +9605,17 @@
               <a:buNone/>
             </a:pPr>
             <a:r>
-              <a:rPr lang="en-US" sz="800" dirty="0">
-                <a:solidFill>
-                  <a:srgbClr val="7A5AA8"/>
-                </a:solidFill>
-                <a:latin typeface="Arial" pitchFamily="34" charset="0"/>
-                <a:ea typeface="Arial" pitchFamily="34" charset="-122"/>
-                <a:cs typeface="Arial" pitchFamily="34" charset="-120"/>
-              </a:rPr>
-              <a:t>Kit IA no Trabalho · Completo · modelo do Seu Sócio Gestor. Troque os textos; mantenha a estrutura.</a:t>
-            </a:r>
-            <a:endParaRPr lang="en-US" sz="800" dirty="0"/>
+              <a:rPr lang="en-US" sz="700" dirty="0">
+                <a:solidFill>
+                  <a:srgbClr val="B89BE0"/>
+                </a:solidFill>
+                <a:latin typeface="Arial" pitchFamily="34" charset="0"/>
+                <a:ea typeface="Arial" pitchFamily="34" charset="-122"/>
+                <a:cs typeface="Arial" pitchFamily="34" charset="-120"/>
+              </a:rPr>
+              <a:t>Kit IA no Trabalho · modelo v1.0 · set/2026</a:t>
+            </a:r>
+            <a:endParaRPr lang="en-US" sz="700" dirty="0"/>
           </a:p>
         </p:txBody>
       </p:sp>
